--- a/output/wordlabs-gyro-3day.pptx
+++ b/output/wordlabs-gyro-3day.pptx
@@ -10629,11 +10629,11 @@
         <p:spPr>
           <a:xfrm>
             <a:off x="1874520" y="4096512"/>
-            <a:ext cx="6903720" cy="804672"/>
+            <a:ext cx="6903720" cy="658368"/>
           </a:xfrm>
           <a:prstGeom prst="rect">
             <a:avLst>
-              <a:gd name="adj" fmla="val 6818"/>
+              <a:gd name="adj" fmla="val 8333"/>
             </a:avLst>
           </a:prstGeom>
           <a:solidFill>
@@ -10656,11 +10656,11 @@
         <p:spPr>
           <a:xfrm>
             <a:off x="1951330" y="4169664"/>
-            <a:ext cx="676656" cy="384048"/>
+            <a:ext cx="676656" cy="475488"/>
           </a:xfrm>
           <a:prstGeom prst="rect">
             <a:avLst>
-              <a:gd name="adj" fmla="val 9524"/>
+              <a:gd name="adj" fmla="val 7692"/>
             </a:avLst>
           </a:prstGeom>
           <a:solidFill>
@@ -10683,7 +10683,7 @@
         <p:spPr>
           <a:xfrm>
             <a:off x="1951330" y="4169664"/>
-            <a:ext cx="676656" cy="384048"/>
+            <a:ext cx="676656" cy="475488"/>
           </a:xfrm>
           <a:prstGeom prst="rect">
             <a:avLst/>
@@ -10707,7 +10707,7 @@
                 <a:ea typeface="Trebuchet MS" pitchFamily="34" charset="-122"/>
                 <a:cs typeface="Trebuchet MS" pitchFamily="34" charset="-120"/>
               </a:rPr>
-              <a:t>j</a:t>
+              <a:t>g</a:t>
             </a:r>
             <a:endParaRPr lang="en-US" sz="900" dirty="0"/>
           </a:p>
@@ -10715,57 +10715,18 @@
       </p:sp>
       <p:sp>
         <p:nvSpPr>
-          <p:cNvPr id="38" name="Text 36"/>
-          <p:cNvSpPr/>
-          <p:nvPr/>
-        </p:nvSpPr>
-        <p:spPr>
-          <a:xfrm>
-            <a:off x="1951330" y="4572000"/>
-            <a:ext cx="676656" cy="219456"/>
-          </a:xfrm>
-          <a:prstGeom prst="rect">
-            <a:avLst/>
-          </a:prstGeom>
-          <a:noFill/>
-          <a:ln/>
-        </p:spPr>
-        <p:txBody>
-          <a:bodyPr wrap="square" lIns="0" tIns="0" rIns="0" bIns="0" rtlCol="0" anchor="t"/>
-          <a:lstStyle/>
-          <a:p>
-            <a:pPr algn="ctr" indent="0" marL="0">
-              <a:buNone/>
-            </a:pPr>
-            <a:r>
-              <a:rPr lang="en-US" sz="750" i="1" dirty="0">
-                <a:solidFill>
-                  <a:srgbClr val="94A3B8"/>
-                </a:solidFill>
-                <a:latin typeface="Calibri" pitchFamily="34" charset="0"/>
-                <a:ea typeface="Calibri" pitchFamily="34" charset="-122"/>
-                <a:cs typeface="Calibri" pitchFamily="34" charset="-120"/>
-              </a:rPr>
-              <a:t>/j/</a:t>
-            </a:r>
-            <a:endParaRPr lang="en-US" sz="750" dirty="0"/>
-          </a:p>
-        </p:txBody>
-      </p:sp>
-      <p:sp>
-        <p:nvSpPr>
-          <p:cNvPr id="39" name="Shape 37"/>
+          <p:cNvPr id="38" name="Shape 36"/>
           <p:cNvSpPr/>
           <p:nvPr/>
         </p:nvSpPr>
         <p:spPr>
           <a:xfrm>
             <a:off x="2677363" y="4169664"/>
-            <a:ext cx="676656" cy="384048"/>
+            <a:ext cx="676656" cy="475488"/>
           </a:xfrm>
           <a:prstGeom prst="rect">
             <a:avLst>
-              <a:gd name="adj" fmla="val 9524"/>
+              <a:gd name="adj" fmla="val 7692"/>
             </a:avLst>
           </a:prstGeom>
           <a:solidFill>
@@ -10781,14 +10742,14 @@
       </p:sp>
       <p:sp>
         <p:nvSpPr>
-          <p:cNvPr id="40" name="Text 38"/>
+          <p:cNvPr id="39" name="Text 37"/>
           <p:cNvSpPr/>
           <p:nvPr/>
         </p:nvSpPr>
         <p:spPr>
           <a:xfrm>
             <a:off x="2677363" y="4169664"/>
-            <a:ext cx="676656" cy="384048"/>
+            <a:ext cx="676656" cy="475488"/>
           </a:xfrm>
           <a:prstGeom prst="rect">
             <a:avLst/>
@@ -10820,18 +10781,18 @@
       </p:sp>
       <p:sp>
         <p:nvSpPr>
-          <p:cNvPr id="41" name="Shape 39"/>
+          <p:cNvPr id="40" name="Shape 38"/>
           <p:cNvSpPr/>
           <p:nvPr/>
         </p:nvSpPr>
         <p:spPr>
           <a:xfrm>
             <a:off x="3403397" y="4169664"/>
-            <a:ext cx="676656" cy="384048"/>
+            <a:ext cx="676656" cy="475488"/>
           </a:xfrm>
           <a:prstGeom prst="rect">
             <a:avLst>
-              <a:gd name="adj" fmla="val 9524"/>
+              <a:gd name="adj" fmla="val 7692"/>
             </a:avLst>
           </a:prstGeom>
           <a:solidFill>
@@ -10847,14 +10808,14 @@
       </p:sp>
       <p:sp>
         <p:nvSpPr>
-          <p:cNvPr id="42" name="Text 40"/>
+          <p:cNvPr id="41" name="Text 39"/>
           <p:cNvSpPr/>
           <p:nvPr/>
         </p:nvSpPr>
         <p:spPr>
           <a:xfrm>
             <a:off x="3403397" y="4169664"/>
-            <a:ext cx="676656" cy="384048"/>
+            <a:ext cx="676656" cy="475488"/>
           </a:xfrm>
           <a:prstGeom prst="rect">
             <a:avLst/>
@@ -10886,18 +10847,18 @@
       </p:sp>
       <p:sp>
         <p:nvSpPr>
-          <p:cNvPr id="43" name="Shape 41"/>
+          <p:cNvPr id="42" name="Shape 40"/>
           <p:cNvSpPr/>
           <p:nvPr/>
         </p:nvSpPr>
         <p:spPr>
           <a:xfrm>
             <a:off x="4129430" y="4169664"/>
-            <a:ext cx="676656" cy="384048"/>
+            <a:ext cx="676656" cy="475488"/>
           </a:xfrm>
           <a:prstGeom prst="rect">
             <a:avLst>
-              <a:gd name="adj" fmla="val 9524"/>
+              <a:gd name="adj" fmla="val 7692"/>
             </a:avLst>
           </a:prstGeom>
           <a:solidFill>
@@ -10913,14 +10874,14 @@
       </p:sp>
       <p:sp>
         <p:nvSpPr>
-          <p:cNvPr id="44" name="Text 42"/>
+          <p:cNvPr id="43" name="Text 41"/>
           <p:cNvSpPr/>
           <p:nvPr/>
         </p:nvSpPr>
         <p:spPr>
           <a:xfrm>
             <a:off x="4129430" y="4169664"/>
-            <a:ext cx="676656" cy="384048"/>
+            <a:ext cx="676656" cy="475488"/>
           </a:xfrm>
           <a:prstGeom prst="rect">
             <a:avLst/>
@@ -10952,18 +10913,18 @@
       </p:sp>
       <p:sp>
         <p:nvSpPr>
-          <p:cNvPr id="45" name="Shape 43"/>
+          <p:cNvPr id="44" name="Shape 42"/>
           <p:cNvSpPr/>
           <p:nvPr/>
         </p:nvSpPr>
         <p:spPr>
           <a:xfrm>
             <a:off x="4855464" y="4169664"/>
-            <a:ext cx="676656" cy="384048"/>
+            <a:ext cx="676656" cy="475488"/>
           </a:xfrm>
           <a:prstGeom prst="rect">
             <a:avLst>
-              <a:gd name="adj" fmla="val 9524"/>
+              <a:gd name="adj" fmla="val 7692"/>
             </a:avLst>
           </a:prstGeom>
           <a:solidFill>
@@ -10979,14 +10940,14 @@
       </p:sp>
       <p:sp>
         <p:nvSpPr>
-          <p:cNvPr id="46" name="Text 44"/>
+          <p:cNvPr id="45" name="Text 43"/>
           <p:cNvSpPr/>
           <p:nvPr/>
         </p:nvSpPr>
         <p:spPr>
           <a:xfrm>
             <a:off x="4855464" y="4169664"/>
-            <a:ext cx="676656" cy="384048"/>
+            <a:ext cx="676656" cy="475488"/>
           </a:xfrm>
           <a:prstGeom prst="rect">
             <a:avLst/>
@@ -11018,80 +10979,41 @@
       </p:sp>
       <p:sp>
         <p:nvSpPr>
+          <p:cNvPr id="46" name="Shape 44"/>
+          <p:cNvSpPr/>
+          <p:nvPr/>
+        </p:nvSpPr>
+        <p:spPr>
+          <a:xfrm>
+            <a:off x="5581498" y="4169664"/>
+            <a:ext cx="676656" cy="475488"/>
+          </a:xfrm>
+          <a:prstGeom prst="rect">
+            <a:avLst>
+              <a:gd name="adj" fmla="val 7692"/>
+            </a:avLst>
+          </a:prstGeom>
+          <a:solidFill>
+            <a:srgbClr val="FFFFFF"/>
+          </a:solidFill>
+          <a:ln w="12700">
+            <a:solidFill>
+              <a:srgbClr val="DB2777"/>
+            </a:solidFill>
+            <a:prstDash val="solid"/>
+          </a:ln>
+        </p:spPr>
+      </p:sp>
+      <p:sp>
+        <p:nvSpPr>
           <p:cNvPr id="47" name="Text 45"/>
           <p:cNvSpPr/>
           <p:nvPr/>
         </p:nvSpPr>
         <p:spPr>
           <a:xfrm>
-            <a:off x="4855464" y="4572000"/>
-            <a:ext cx="676656" cy="219456"/>
-          </a:xfrm>
-          <a:prstGeom prst="rect">
-            <a:avLst/>
-          </a:prstGeom>
-          <a:noFill/>
-          <a:ln/>
-        </p:spPr>
-        <p:txBody>
-          <a:bodyPr wrap="square" lIns="0" tIns="0" rIns="0" bIns="0" rtlCol="0" anchor="t"/>
-          <a:lstStyle/>
-          <a:p>
-            <a:pPr algn="ctr" indent="0" marL="0">
-              <a:buNone/>
-            </a:pPr>
-            <a:r>
-              <a:rPr lang="en-US" sz="750" i="1" dirty="0">
-                <a:solidFill>
-                  <a:srgbClr val="94A3B8"/>
-                </a:solidFill>
-                <a:latin typeface="Calibri" pitchFamily="34" charset="0"/>
-                <a:ea typeface="Calibri" pitchFamily="34" charset="-122"/>
-                <a:cs typeface="Calibri" pitchFamily="34" charset="-120"/>
-              </a:rPr>
-              <a:t>/s/</a:t>
-            </a:r>
-            <a:endParaRPr lang="en-US" sz="750" dirty="0"/>
-          </a:p>
-        </p:txBody>
-      </p:sp>
-      <p:sp>
-        <p:nvSpPr>
-          <p:cNvPr id="48" name="Shape 46"/>
-          <p:cNvSpPr/>
-          <p:nvPr/>
-        </p:nvSpPr>
-        <p:spPr>
-          <a:xfrm>
             <a:off x="5581498" y="4169664"/>
-            <a:ext cx="676656" cy="384048"/>
-          </a:xfrm>
-          <a:prstGeom prst="rect">
-            <a:avLst>
-              <a:gd name="adj" fmla="val 9524"/>
-            </a:avLst>
-          </a:prstGeom>
-          <a:solidFill>
-            <a:srgbClr val="FFFFFF"/>
-          </a:solidFill>
-          <a:ln w="12700">
-            <a:solidFill>
-              <a:srgbClr val="DB2777"/>
-            </a:solidFill>
-            <a:prstDash val="solid"/>
-          </a:ln>
-        </p:spPr>
-      </p:sp>
-      <p:sp>
-        <p:nvSpPr>
-          <p:cNvPr id="49" name="Text 47"/>
-          <p:cNvSpPr/>
-          <p:nvPr/>
-        </p:nvSpPr>
-        <p:spPr>
-          <a:xfrm>
-            <a:off x="5581498" y="4169664"/>
-            <a:ext cx="676656" cy="384048"/>
+            <a:ext cx="676656" cy="475488"/>
           </a:xfrm>
           <a:prstGeom prst="rect">
             <a:avLst/>
@@ -11123,57 +11045,18 @@
       </p:sp>
       <p:sp>
         <p:nvSpPr>
-          <p:cNvPr id="50" name="Text 48"/>
-          <p:cNvSpPr/>
-          <p:nvPr/>
-        </p:nvSpPr>
-        <p:spPr>
-          <a:xfrm>
-            <a:off x="5581498" y="4572000"/>
-            <a:ext cx="676656" cy="219456"/>
-          </a:xfrm>
-          <a:prstGeom prst="rect">
-            <a:avLst/>
-          </a:prstGeom>
-          <a:noFill/>
-          <a:ln/>
-        </p:spPr>
-        <p:txBody>
-          <a:bodyPr wrap="square" lIns="0" tIns="0" rIns="0" bIns="0" rtlCol="0" anchor="t"/>
-          <a:lstStyle/>
-          <a:p>
-            <a:pPr algn="ctr" indent="0" marL="0">
-              <a:buNone/>
-            </a:pPr>
-            <a:r>
-              <a:rPr lang="en-US" sz="750" i="1" dirty="0">
-                <a:solidFill>
-                  <a:srgbClr val="94A3B8"/>
-                </a:solidFill>
-                <a:latin typeface="Calibri" pitchFamily="34" charset="0"/>
-                <a:ea typeface="Calibri" pitchFamily="34" charset="-122"/>
-                <a:cs typeface="Calibri" pitchFamily="34" charset="-120"/>
-              </a:rPr>
-              <a:t>/k/</a:t>
-            </a:r>
-            <a:endParaRPr lang="en-US" sz="750" dirty="0"/>
-          </a:p>
-        </p:txBody>
-      </p:sp>
-      <p:sp>
-        <p:nvSpPr>
-          <p:cNvPr id="51" name="Shape 49"/>
+          <p:cNvPr id="48" name="Shape 46"/>
           <p:cNvSpPr/>
           <p:nvPr/>
         </p:nvSpPr>
         <p:spPr>
           <a:xfrm>
             <a:off x="6307531" y="4169664"/>
-            <a:ext cx="676656" cy="384048"/>
+            <a:ext cx="676656" cy="475488"/>
           </a:xfrm>
           <a:prstGeom prst="rect">
             <a:avLst>
-              <a:gd name="adj" fmla="val 9524"/>
+              <a:gd name="adj" fmla="val 7692"/>
             </a:avLst>
           </a:prstGeom>
           <a:solidFill>
@@ -11189,14 +11072,14 @@
       </p:sp>
       <p:sp>
         <p:nvSpPr>
-          <p:cNvPr id="52" name="Text 50"/>
+          <p:cNvPr id="49" name="Text 47"/>
           <p:cNvSpPr/>
           <p:nvPr/>
         </p:nvSpPr>
         <p:spPr>
           <a:xfrm>
             <a:off x="6307531" y="4169664"/>
-            <a:ext cx="676656" cy="384048"/>
+            <a:ext cx="676656" cy="475488"/>
           </a:xfrm>
           <a:prstGeom prst="rect">
             <a:avLst/>
@@ -11228,18 +11111,18 @@
       </p:sp>
       <p:sp>
         <p:nvSpPr>
-          <p:cNvPr id="53" name="Shape 51"/>
+          <p:cNvPr id="50" name="Shape 48"/>
           <p:cNvSpPr/>
           <p:nvPr/>
         </p:nvSpPr>
         <p:spPr>
           <a:xfrm>
             <a:off x="7033565" y="4169664"/>
-            <a:ext cx="676656" cy="384048"/>
+            <a:ext cx="676656" cy="475488"/>
           </a:xfrm>
           <a:prstGeom prst="rect">
             <a:avLst>
-              <a:gd name="adj" fmla="val 9524"/>
+              <a:gd name="adj" fmla="val 7692"/>
             </a:avLst>
           </a:prstGeom>
           <a:solidFill>
@@ -11255,14 +11138,14 @@
       </p:sp>
       <p:sp>
         <p:nvSpPr>
-          <p:cNvPr id="54" name="Text 52"/>
+          <p:cNvPr id="51" name="Text 49"/>
           <p:cNvSpPr/>
           <p:nvPr/>
         </p:nvSpPr>
         <p:spPr>
           <a:xfrm>
             <a:off x="7033565" y="4169664"/>
-            <a:ext cx="676656" cy="384048"/>
+            <a:ext cx="676656" cy="475488"/>
           </a:xfrm>
           <a:prstGeom prst="rect">
             <a:avLst/>
@@ -11294,18 +11177,18 @@
       </p:sp>
       <p:sp>
         <p:nvSpPr>
-          <p:cNvPr id="55" name="Shape 53"/>
+          <p:cNvPr id="52" name="Shape 50"/>
           <p:cNvSpPr/>
           <p:nvPr/>
         </p:nvSpPr>
         <p:spPr>
           <a:xfrm>
             <a:off x="7759598" y="4169664"/>
-            <a:ext cx="676656" cy="384048"/>
+            <a:ext cx="676656" cy="475488"/>
           </a:xfrm>
           <a:prstGeom prst="rect">
             <a:avLst>
-              <a:gd name="adj" fmla="val 9524"/>
+              <a:gd name="adj" fmla="val 7692"/>
             </a:avLst>
           </a:prstGeom>
           <a:solidFill>
@@ -11321,14 +11204,14 @@
       </p:sp>
       <p:sp>
         <p:nvSpPr>
-          <p:cNvPr id="56" name="Text 54"/>
+          <p:cNvPr id="53" name="Text 51"/>
           <p:cNvSpPr/>
           <p:nvPr/>
         </p:nvSpPr>
         <p:spPr>
           <a:xfrm>
             <a:off x="7759598" y="4169664"/>
-            <a:ext cx="676656" cy="384048"/>
+            <a:ext cx="676656" cy="475488"/>
           </a:xfrm>
           <a:prstGeom prst="rect">
             <a:avLst/>
@@ -15822,11 +15705,11 @@
         <p:spPr>
           <a:xfrm>
             <a:off x="1874520" y="4096512"/>
-            <a:ext cx="6903720" cy="804672"/>
+            <a:ext cx="6903720" cy="658368"/>
           </a:xfrm>
           <a:prstGeom prst="rect">
             <a:avLst>
-              <a:gd name="adj" fmla="val 6818"/>
+              <a:gd name="adj" fmla="val 8333"/>
             </a:avLst>
           </a:prstGeom>
           <a:solidFill>
@@ -15848,12 +15731,12 @@
         </p:nvSpPr>
         <p:spPr>
           <a:xfrm>
-            <a:off x="2254649" y="4169664"/>
-            <a:ext cx="685800" cy="384048"/>
+            <a:off x="2023872" y="4169664"/>
+            <a:ext cx="685800" cy="475488"/>
           </a:xfrm>
           <a:prstGeom prst="rect">
             <a:avLst>
-              <a:gd name="adj" fmla="val 9524"/>
+              <a:gd name="adj" fmla="val 7692"/>
             </a:avLst>
           </a:prstGeom>
           <a:solidFill>
@@ -15875,8 +15758,8 @@
         </p:nvSpPr>
         <p:spPr>
           <a:xfrm>
-            <a:off x="2254649" y="4169664"/>
-            <a:ext cx="685800" cy="384048"/>
+            <a:off x="2023872" y="4169664"/>
+            <a:ext cx="685800" cy="475488"/>
           </a:xfrm>
           <a:prstGeom prst="rect">
             <a:avLst/>
@@ -15900,7 +15783,7 @@
                 <a:ea typeface="Trebuchet MS" pitchFamily="34" charset="-122"/>
                 <a:cs typeface="Trebuchet MS" pitchFamily="34" charset="-120"/>
               </a:rPr>
-              <a:t>j</a:t>
+              <a:t>g</a:t>
             </a:r>
             <a:endParaRPr lang="en-US" sz="900" dirty="0"/>
           </a:p>
@@ -15908,57 +15791,18 @@
       </p:sp>
       <p:sp>
         <p:nvSpPr>
-          <p:cNvPr id="38" name="Text 36"/>
-          <p:cNvSpPr/>
-          <p:nvPr/>
-        </p:nvSpPr>
-        <p:spPr>
-          <a:xfrm>
-            <a:off x="2254649" y="4572000"/>
-            <a:ext cx="685800" cy="219456"/>
-          </a:xfrm>
-          <a:prstGeom prst="rect">
-            <a:avLst/>
-          </a:prstGeom>
-          <a:noFill/>
-          <a:ln/>
-        </p:spPr>
-        <p:txBody>
-          <a:bodyPr wrap="square" lIns="0" tIns="0" rIns="0" bIns="0" rtlCol="0" anchor="t"/>
-          <a:lstStyle/>
-          <a:p>
-            <a:pPr algn="ctr" indent="0" marL="0">
-              <a:buNone/>
-            </a:pPr>
-            <a:r>
-              <a:rPr lang="en-US" sz="750" i="1" dirty="0">
-                <a:solidFill>
-                  <a:srgbClr val="94A3B8"/>
-                </a:solidFill>
-                <a:latin typeface="Calibri" pitchFamily="34" charset="0"/>
-                <a:ea typeface="Calibri" pitchFamily="34" charset="-122"/>
-                <a:cs typeface="Calibri" pitchFamily="34" charset="-120"/>
-              </a:rPr>
-              <a:t>/j/</a:t>
-            </a:r>
-            <a:endParaRPr lang="en-US" sz="750" dirty="0"/>
-          </a:p>
-        </p:txBody>
-      </p:sp>
-      <p:sp>
-        <p:nvSpPr>
-          <p:cNvPr id="39" name="Shape 37"/>
-          <p:cNvSpPr/>
-          <p:nvPr/>
-        </p:nvSpPr>
-        <p:spPr>
-          <a:xfrm>
-            <a:off x="3293146" y="4169664"/>
-            <a:ext cx="685800" cy="384048"/>
+          <p:cNvPr id="38" name="Shape 36"/>
+          <p:cNvSpPr/>
+          <p:nvPr/>
+        </p:nvSpPr>
+        <p:spPr>
+          <a:xfrm>
+            <a:off x="2831592" y="4169664"/>
+            <a:ext cx="685800" cy="475488"/>
           </a:xfrm>
           <a:prstGeom prst="rect">
             <a:avLst>
-              <a:gd name="adj" fmla="val 9524"/>
+              <a:gd name="adj" fmla="val 7692"/>
             </a:avLst>
           </a:prstGeom>
           <a:solidFill>
@@ -15974,14 +15818,14 @@
       </p:sp>
       <p:sp>
         <p:nvSpPr>
-          <p:cNvPr id="40" name="Text 38"/>
-          <p:cNvSpPr/>
-          <p:nvPr/>
-        </p:nvSpPr>
-        <p:spPr>
-          <a:xfrm>
-            <a:off x="3293146" y="4169664"/>
-            <a:ext cx="685800" cy="384048"/>
+          <p:cNvPr id="39" name="Text 37"/>
+          <p:cNvSpPr/>
+          <p:nvPr/>
+        </p:nvSpPr>
+        <p:spPr>
+          <a:xfrm>
+            <a:off x="2831592" y="4169664"/>
+            <a:ext cx="685800" cy="475488"/>
           </a:xfrm>
           <a:prstGeom prst="rect">
             <a:avLst/>
@@ -16013,18 +15857,18 @@
       </p:sp>
       <p:sp>
         <p:nvSpPr>
-          <p:cNvPr id="41" name="Shape 39"/>
-          <p:cNvSpPr/>
-          <p:nvPr/>
-        </p:nvSpPr>
-        <p:spPr>
-          <a:xfrm>
-            <a:off x="4331643" y="4169664"/>
-            <a:ext cx="685800" cy="384048"/>
+          <p:cNvPr id="40" name="Shape 38"/>
+          <p:cNvSpPr/>
+          <p:nvPr/>
+        </p:nvSpPr>
+        <p:spPr>
+          <a:xfrm>
+            <a:off x="3639312" y="4169664"/>
+            <a:ext cx="685800" cy="475488"/>
           </a:xfrm>
           <a:prstGeom prst="rect">
             <a:avLst>
-              <a:gd name="adj" fmla="val 9524"/>
+              <a:gd name="adj" fmla="val 7692"/>
             </a:avLst>
           </a:prstGeom>
           <a:solidFill>
@@ -16040,14 +15884,14 @@
       </p:sp>
       <p:sp>
         <p:nvSpPr>
-          <p:cNvPr id="42" name="Text 40"/>
-          <p:cNvSpPr/>
-          <p:nvPr/>
-        </p:nvSpPr>
-        <p:spPr>
-          <a:xfrm>
-            <a:off x="4331643" y="4169664"/>
-            <a:ext cx="685800" cy="384048"/>
+          <p:cNvPr id="41" name="Text 39"/>
+          <p:cNvSpPr/>
+          <p:nvPr/>
+        </p:nvSpPr>
+        <p:spPr>
+          <a:xfrm>
+            <a:off x="3639312" y="4169664"/>
+            <a:ext cx="685800" cy="475488"/>
           </a:xfrm>
           <a:prstGeom prst="rect">
             <a:avLst/>
@@ -16079,18 +15923,18 @@
       </p:sp>
       <p:sp>
         <p:nvSpPr>
-          <p:cNvPr id="43" name="Shape 41"/>
-          <p:cNvSpPr/>
-          <p:nvPr/>
-        </p:nvSpPr>
-        <p:spPr>
-          <a:xfrm>
-            <a:off x="5370141" y="4169664"/>
-            <a:ext cx="685800" cy="384048"/>
+          <p:cNvPr id="42" name="Shape 40"/>
+          <p:cNvSpPr/>
+          <p:nvPr/>
+        </p:nvSpPr>
+        <p:spPr>
+          <a:xfrm>
+            <a:off x="4447032" y="4169664"/>
+            <a:ext cx="685800" cy="475488"/>
           </a:xfrm>
           <a:prstGeom prst="rect">
             <a:avLst>
-              <a:gd name="adj" fmla="val 9524"/>
+              <a:gd name="adj" fmla="val 7692"/>
             </a:avLst>
           </a:prstGeom>
           <a:solidFill>
@@ -16106,14 +15950,14 @@
       </p:sp>
       <p:sp>
         <p:nvSpPr>
-          <p:cNvPr id="44" name="Text 42"/>
-          <p:cNvSpPr/>
-          <p:nvPr/>
-        </p:nvSpPr>
-        <p:spPr>
-          <a:xfrm>
-            <a:off x="5370141" y="4169664"/>
-            <a:ext cx="685800" cy="384048"/>
+          <p:cNvPr id="43" name="Text 41"/>
+          <p:cNvSpPr/>
+          <p:nvPr/>
+        </p:nvSpPr>
+        <p:spPr>
+          <a:xfrm>
+            <a:off x="4447032" y="4169664"/>
+            <a:ext cx="685800" cy="475488"/>
           </a:xfrm>
           <a:prstGeom prst="rect">
             <a:avLst/>
@@ -16145,18 +15989,18 @@
       </p:sp>
       <p:sp>
         <p:nvSpPr>
-          <p:cNvPr id="45" name="Shape 43"/>
-          <p:cNvSpPr/>
-          <p:nvPr/>
-        </p:nvSpPr>
-        <p:spPr>
-          <a:xfrm>
-            <a:off x="6408638" y="4169664"/>
-            <a:ext cx="685800" cy="384048"/>
+          <p:cNvPr id="44" name="Shape 42"/>
+          <p:cNvSpPr/>
+          <p:nvPr/>
+        </p:nvSpPr>
+        <p:spPr>
+          <a:xfrm>
+            <a:off x="5254752" y="4169664"/>
+            <a:ext cx="685800" cy="475488"/>
           </a:xfrm>
           <a:prstGeom prst="rect">
             <a:avLst>
-              <a:gd name="adj" fmla="val 9524"/>
+              <a:gd name="adj" fmla="val 7692"/>
             </a:avLst>
           </a:prstGeom>
           <a:solidFill>
@@ -16172,14 +16016,14 @@
       </p:sp>
       <p:sp>
         <p:nvSpPr>
-          <p:cNvPr id="46" name="Text 44"/>
-          <p:cNvSpPr/>
-          <p:nvPr/>
-        </p:nvSpPr>
-        <p:spPr>
-          <a:xfrm>
-            <a:off x="6408638" y="4169664"/>
-            <a:ext cx="685800" cy="384048"/>
+          <p:cNvPr id="45" name="Text 43"/>
+          <p:cNvSpPr/>
+          <p:nvPr/>
+        </p:nvSpPr>
+        <p:spPr>
+          <a:xfrm>
+            <a:off x="5254752" y="4169664"/>
+            <a:ext cx="685800" cy="475488"/>
           </a:xfrm>
           <a:prstGeom prst="rect">
             <a:avLst/>
@@ -16203,7 +16047,7 @@
                 <a:ea typeface="Trebuchet MS" pitchFamily="34" charset="-122"/>
                 <a:cs typeface="Trebuchet MS" pitchFamily="34" charset="-120"/>
               </a:rPr>
-              <a:t>ti</a:t>
+              <a:t>t</a:t>
             </a:r>
             <a:endParaRPr lang="en-US" sz="900" dirty="0"/>
           </a:p>
@@ -16211,80 +16055,41 @@
       </p:sp>
       <p:sp>
         <p:nvSpPr>
+          <p:cNvPr id="46" name="Shape 44"/>
+          <p:cNvSpPr/>
+          <p:nvPr/>
+        </p:nvSpPr>
+        <p:spPr>
+          <a:xfrm>
+            <a:off x="6062472" y="4169664"/>
+            <a:ext cx="685800" cy="475488"/>
+          </a:xfrm>
+          <a:prstGeom prst="rect">
+            <a:avLst>
+              <a:gd name="adj" fmla="val 7692"/>
+            </a:avLst>
+          </a:prstGeom>
+          <a:solidFill>
+            <a:srgbClr val="FFFFFF"/>
+          </a:solidFill>
+          <a:ln w="12700">
+            <a:solidFill>
+              <a:srgbClr val="DB2777"/>
+            </a:solidFill>
+            <a:prstDash val="solid"/>
+          </a:ln>
+        </p:spPr>
+      </p:sp>
+      <p:sp>
+        <p:nvSpPr>
           <p:cNvPr id="47" name="Text 45"/>
           <p:cNvSpPr/>
           <p:nvPr/>
         </p:nvSpPr>
         <p:spPr>
           <a:xfrm>
-            <a:off x="6408638" y="4572000"/>
-            <a:ext cx="685800" cy="219456"/>
-          </a:xfrm>
-          <a:prstGeom prst="rect">
-            <a:avLst/>
-          </a:prstGeom>
-          <a:noFill/>
-          <a:ln/>
-        </p:spPr>
-        <p:txBody>
-          <a:bodyPr wrap="square" lIns="0" tIns="0" rIns="0" bIns="0" rtlCol="0" anchor="t"/>
-          <a:lstStyle/>
-          <a:p>
-            <a:pPr algn="ctr" indent="0" marL="0">
-              <a:buNone/>
-            </a:pPr>
-            <a:r>
-              <a:rPr lang="en-US" sz="750" i="1" dirty="0">
-                <a:solidFill>
-                  <a:srgbClr val="94A3B8"/>
-                </a:solidFill>
-                <a:latin typeface="Calibri" pitchFamily="34" charset="0"/>
-                <a:ea typeface="Calibri" pitchFamily="34" charset="-122"/>
-                <a:cs typeface="Calibri" pitchFamily="34" charset="-120"/>
-              </a:rPr>
-              <a:t>/sh/</a:t>
-            </a:r>
-            <a:endParaRPr lang="en-US" sz="750" dirty="0"/>
-          </a:p>
-        </p:txBody>
-      </p:sp>
-      <p:sp>
-        <p:nvSpPr>
-          <p:cNvPr id="48" name="Shape 46"/>
-          <p:cNvSpPr/>
-          <p:nvPr/>
-        </p:nvSpPr>
-        <p:spPr>
-          <a:xfrm>
-            <a:off x="7447135" y="4169664"/>
-            <a:ext cx="685800" cy="384048"/>
-          </a:xfrm>
-          <a:prstGeom prst="rect">
-            <a:avLst>
-              <a:gd name="adj" fmla="val 9524"/>
-            </a:avLst>
-          </a:prstGeom>
-          <a:solidFill>
-            <a:srgbClr val="FFFFFF"/>
-          </a:solidFill>
-          <a:ln w="12700">
-            <a:solidFill>
-              <a:srgbClr val="DB2777"/>
-            </a:solidFill>
-            <a:prstDash val="solid"/>
-          </a:ln>
-        </p:spPr>
-      </p:sp>
-      <p:sp>
-        <p:nvSpPr>
-          <p:cNvPr id="49" name="Text 47"/>
-          <p:cNvSpPr/>
-          <p:nvPr/>
-        </p:nvSpPr>
-        <p:spPr>
-          <a:xfrm>
-            <a:off x="7447135" y="4169664"/>
-            <a:ext cx="685800" cy="384048"/>
+            <a:off x="6062472" y="4169664"/>
+            <a:ext cx="685800" cy="475488"/>
           </a:xfrm>
           <a:prstGeom prst="rect">
             <a:avLst/>
@@ -16308,7 +16113,139 @@
                 <a:ea typeface="Trebuchet MS" pitchFamily="34" charset="-122"/>
                 <a:cs typeface="Trebuchet MS" pitchFamily="34" charset="-120"/>
               </a:rPr>
-              <a:t>on</a:t>
+              <a:t>i</a:t>
+            </a:r>
+            <a:endParaRPr lang="en-US" sz="900" dirty="0"/>
+          </a:p>
+        </p:txBody>
+      </p:sp>
+      <p:sp>
+        <p:nvSpPr>
+          <p:cNvPr id="48" name="Shape 46"/>
+          <p:cNvSpPr/>
+          <p:nvPr/>
+        </p:nvSpPr>
+        <p:spPr>
+          <a:xfrm>
+            <a:off x="6870192" y="4169664"/>
+            <a:ext cx="685800" cy="475488"/>
+          </a:xfrm>
+          <a:prstGeom prst="rect">
+            <a:avLst>
+              <a:gd name="adj" fmla="val 7692"/>
+            </a:avLst>
+          </a:prstGeom>
+          <a:solidFill>
+            <a:srgbClr val="FFFFFF"/>
+          </a:solidFill>
+          <a:ln w="12700">
+            <a:solidFill>
+              <a:srgbClr val="DB2777"/>
+            </a:solidFill>
+            <a:prstDash val="solid"/>
+          </a:ln>
+        </p:spPr>
+      </p:sp>
+      <p:sp>
+        <p:nvSpPr>
+          <p:cNvPr id="49" name="Text 47"/>
+          <p:cNvSpPr/>
+          <p:nvPr/>
+        </p:nvSpPr>
+        <p:spPr>
+          <a:xfrm>
+            <a:off x="6870192" y="4169664"/>
+            <a:ext cx="685800" cy="475488"/>
+          </a:xfrm>
+          <a:prstGeom prst="rect">
+            <a:avLst/>
+          </a:prstGeom>
+          <a:noFill/>
+          <a:ln/>
+        </p:spPr>
+        <p:txBody>
+          <a:bodyPr wrap="square" lIns="0" tIns="0" rIns="0" bIns="0" rtlCol="0" anchor="ctr"/>
+          <a:lstStyle/>
+          <a:p>
+            <a:pPr algn="ctr" indent="0" marL="0">
+              <a:buNone/>
+            </a:pPr>
+            <a:r>
+              <a:rPr lang="en-US" sz="900" b="1" dirty="0">
+                <a:solidFill>
+                  <a:srgbClr val="9D174D"/>
+                </a:solidFill>
+                <a:latin typeface="Trebuchet MS" pitchFamily="34" charset="0"/>
+                <a:ea typeface="Trebuchet MS" pitchFamily="34" charset="-122"/>
+                <a:cs typeface="Trebuchet MS" pitchFamily="34" charset="-120"/>
+              </a:rPr>
+              <a:t>o</a:t>
+            </a:r>
+            <a:endParaRPr lang="en-US" sz="900" dirty="0"/>
+          </a:p>
+        </p:txBody>
+      </p:sp>
+      <p:sp>
+        <p:nvSpPr>
+          <p:cNvPr id="50" name="Shape 48"/>
+          <p:cNvSpPr/>
+          <p:nvPr/>
+        </p:nvSpPr>
+        <p:spPr>
+          <a:xfrm>
+            <a:off x="7677912" y="4169664"/>
+            <a:ext cx="685800" cy="475488"/>
+          </a:xfrm>
+          <a:prstGeom prst="rect">
+            <a:avLst>
+              <a:gd name="adj" fmla="val 7692"/>
+            </a:avLst>
+          </a:prstGeom>
+          <a:solidFill>
+            <a:srgbClr val="FFFFFF"/>
+          </a:solidFill>
+          <a:ln w="12700">
+            <a:solidFill>
+              <a:srgbClr val="DB2777"/>
+            </a:solidFill>
+            <a:prstDash val="solid"/>
+          </a:ln>
+        </p:spPr>
+      </p:sp>
+      <p:sp>
+        <p:nvSpPr>
+          <p:cNvPr id="51" name="Text 49"/>
+          <p:cNvSpPr/>
+          <p:nvPr/>
+        </p:nvSpPr>
+        <p:spPr>
+          <a:xfrm>
+            <a:off x="7677912" y="4169664"/>
+            <a:ext cx="685800" cy="475488"/>
+          </a:xfrm>
+          <a:prstGeom prst="rect">
+            <a:avLst/>
+          </a:prstGeom>
+          <a:noFill/>
+          <a:ln/>
+        </p:spPr>
+        <p:txBody>
+          <a:bodyPr wrap="square" lIns="0" tIns="0" rIns="0" bIns="0" rtlCol="0" anchor="ctr"/>
+          <a:lstStyle/>
+          <a:p>
+            <a:pPr algn="ctr" indent="0" marL="0">
+              <a:buNone/>
+            </a:pPr>
+            <a:r>
+              <a:rPr lang="en-US" sz="900" b="1" dirty="0">
+                <a:solidFill>
+                  <a:srgbClr val="9D174D"/>
+                </a:solidFill>
+                <a:latin typeface="Trebuchet MS" pitchFamily="34" charset="0"/>
+                <a:ea typeface="Trebuchet MS" pitchFamily="34" charset="-122"/>
+                <a:cs typeface="Trebuchet MS" pitchFamily="34" charset="-120"/>
+              </a:rPr>
+              <a:t>n</a:t>
             </a:r>
             <a:endParaRPr lang="en-US" sz="900" dirty="0"/>
           </a:p>
@@ -22592,11 +22529,11 @@
         <p:spPr>
           <a:xfrm>
             <a:off x="1874520" y="4096512"/>
-            <a:ext cx="6903720" cy="804672"/>
+            <a:ext cx="6903720" cy="658368"/>
           </a:xfrm>
           <a:prstGeom prst="rect">
             <a:avLst>
-              <a:gd name="adj" fmla="val 6818"/>
+              <a:gd name="adj" fmla="val 8333"/>
             </a:avLst>
           </a:prstGeom>
           <a:solidFill>
@@ -22619,11 +22556,11 @@
         <p:spPr>
           <a:xfrm>
             <a:off x="2124837" y="4169664"/>
-            <a:ext cx="685800" cy="384048"/>
+            <a:ext cx="685800" cy="475488"/>
           </a:xfrm>
           <a:prstGeom prst="rect">
             <a:avLst>
-              <a:gd name="adj" fmla="val 9524"/>
+              <a:gd name="adj" fmla="val 7692"/>
             </a:avLst>
           </a:prstGeom>
           <a:solidFill>
@@ -22646,7 +22583,7 @@
         <p:spPr>
           <a:xfrm>
             <a:off x="2124837" y="4169664"/>
-            <a:ext cx="685800" cy="384048"/>
+            <a:ext cx="685800" cy="475488"/>
           </a:xfrm>
           <a:prstGeom prst="rect">
             <a:avLst/>
@@ -22685,11 +22622,11 @@
         <p:spPr>
           <a:xfrm>
             <a:off x="3033522" y="4169664"/>
-            <a:ext cx="685800" cy="384048"/>
+            <a:ext cx="685800" cy="475488"/>
           </a:xfrm>
           <a:prstGeom prst="rect">
             <a:avLst>
-              <a:gd name="adj" fmla="val 9524"/>
+              <a:gd name="adj" fmla="val 7692"/>
             </a:avLst>
           </a:prstGeom>
           <a:solidFill>
@@ -22712,7 +22649,7 @@
         <p:spPr>
           <a:xfrm>
             <a:off x="3033522" y="4169664"/>
-            <a:ext cx="685800" cy="384048"/>
+            <a:ext cx="685800" cy="475488"/>
           </a:xfrm>
           <a:prstGeom prst="rect">
             <a:avLst/>
@@ -22751,11 +22688,11 @@
         <p:spPr>
           <a:xfrm>
             <a:off x="3942207" y="4169664"/>
-            <a:ext cx="685800" cy="384048"/>
+            <a:ext cx="685800" cy="475488"/>
           </a:xfrm>
           <a:prstGeom prst="rect">
             <a:avLst>
-              <a:gd name="adj" fmla="val 9524"/>
+              <a:gd name="adj" fmla="val 7692"/>
             </a:avLst>
           </a:prstGeom>
           <a:solidFill>
@@ -22778,7 +22715,7 @@
         <p:spPr>
           <a:xfrm>
             <a:off x="3942207" y="4169664"/>
-            <a:ext cx="685800" cy="384048"/>
+            <a:ext cx="685800" cy="475488"/>
           </a:xfrm>
           <a:prstGeom prst="rect">
             <a:avLst/>
@@ -22817,11 +22754,11 @@
         <p:spPr>
           <a:xfrm>
             <a:off x="4850892" y="4169664"/>
-            <a:ext cx="685800" cy="384048"/>
+            <a:ext cx="685800" cy="475488"/>
           </a:xfrm>
           <a:prstGeom prst="rect">
             <a:avLst>
-              <a:gd name="adj" fmla="val 9524"/>
+              <a:gd name="adj" fmla="val 7692"/>
             </a:avLst>
           </a:prstGeom>
           <a:solidFill>
@@ -22844,7 +22781,7 @@
         <p:spPr>
           <a:xfrm>
             <a:off x="4850892" y="4169664"/>
-            <a:ext cx="685800" cy="384048"/>
+            <a:ext cx="685800" cy="475488"/>
           </a:xfrm>
           <a:prstGeom prst="rect">
             <a:avLst/>
@@ -22868,7 +22805,7 @@
                 <a:ea typeface="Trebuchet MS" pitchFamily="34" charset="-122"/>
                 <a:cs typeface="Trebuchet MS" pitchFamily="34" charset="-120"/>
               </a:rPr>
-              <a:t>j</a:t>
+              <a:t>g</a:t>
             </a:r>
             <a:endParaRPr lang="en-US" sz="900" dirty="0"/>
           </a:p>
@@ -22876,57 +22813,18 @@
       </p:sp>
       <p:sp>
         <p:nvSpPr>
-          <p:cNvPr id="47" name="Text 45"/>
-          <p:cNvSpPr/>
-          <p:nvPr/>
-        </p:nvSpPr>
-        <p:spPr>
-          <a:xfrm>
-            <a:off x="4850892" y="4572000"/>
-            <a:ext cx="685800" cy="219456"/>
-          </a:xfrm>
-          <a:prstGeom prst="rect">
-            <a:avLst/>
-          </a:prstGeom>
-          <a:noFill/>
-          <a:ln/>
-        </p:spPr>
-        <p:txBody>
-          <a:bodyPr wrap="square" lIns="0" tIns="0" rIns="0" bIns="0" rtlCol="0" anchor="t"/>
-          <a:lstStyle/>
-          <a:p>
-            <a:pPr algn="ctr" indent="0" marL="0">
-              <a:buNone/>
-            </a:pPr>
-            <a:r>
-              <a:rPr lang="en-US" sz="750" i="1" dirty="0">
-                <a:solidFill>
-                  <a:srgbClr val="94A3B8"/>
-                </a:solidFill>
-                <a:latin typeface="Calibri" pitchFamily="34" charset="0"/>
-                <a:ea typeface="Calibri" pitchFamily="34" charset="-122"/>
-                <a:cs typeface="Calibri" pitchFamily="34" charset="-120"/>
-              </a:rPr>
-              <a:t>/j/</a:t>
-            </a:r>
-            <a:endParaRPr lang="en-US" sz="750" dirty="0"/>
-          </a:p>
-        </p:txBody>
-      </p:sp>
-      <p:sp>
-        <p:nvSpPr>
-          <p:cNvPr id="48" name="Shape 46"/>
+          <p:cNvPr id="47" name="Shape 45"/>
           <p:cNvSpPr/>
           <p:nvPr/>
         </p:nvSpPr>
         <p:spPr>
           <a:xfrm>
             <a:off x="5759577" y="4169664"/>
-            <a:ext cx="685800" cy="384048"/>
+            <a:ext cx="685800" cy="475488"/>
           </a:xfrm>
           <a:prstGeom prst="rect">
             <a:avLst>
-              <a:gd name="adj" fmla="val 9524"/>
+              <a:gd name="adj" fmla="val 7692"/>
             </a:avLst>
           </a:prstGeom>
           <a:solidFill>
@@ -22942,14 +22840,14 @@
       </p:sp>
       <p:sp>
         <p:nvSpPr>
-          <p:cNvPr id="49" name="Text 47"/>
+          <p:cNvPr id="48" name="Text 46"/>
           <p:cNvSpPr/>
           <p:nvPr/>
         </p:nvSpPr>
         <p:spPr>
           <a:xfrm>
             <a:off x="5759577" y="4169664"/>
-            <a:ext cx="685800" cy="384048"/>
+            <a:ext cx="685800" cy="475488"/>
           </a:xfrm>
           <a:prstGeom prst="rect">
             <a:avLst/>
@@ -22981,18 +22879,18 @@
       </p:sp>
       <p:sp>
         <p:nvSpPr>
-          <p:cNvPr id="50" name="Shape 48"/>
+          <p:cNvPr id="49" name="Shape 47"/>
           <p:cNvSpPr/>
           <p:nvPr/>
         </p:nvSpPr>
         <p:spPr>
           <a:xfrm>
             <a:off x="6668262" y="4169664"/>
-            <a:ext cx="685800" cy="384048"/>
+            <a:ext cx="685800" cy="475488"/>
           </a:xfrm>
           <a:prstGeom prst="rect">
             <a:avLst>
-              <a:gd name="adj" fmla="val 9524"/>
+              <a:gd name="adj" fmla="val 7692"/>
             </a:avLst>
           </a:prstGeom>
           <a:solidFill>
@@ -23008,14 +22906,14 @@
       </p:sp>
       <p:sp>
         <p:nvSpPr>
-          <p:cNvPr id="51" name="Text 49"/>
+          <p:cNvPr id="50" name="Text 48"/>
           <p:cNvSpPr/>
           <p:nvPr/>
         </p:nvSpPr>
         <p:spPr>
           <a:xfrm>
             <a:off x="6668262" y="4169664"/>
-            <a:ext cx="685800" cy="384048"/>
+            <a:ext cx="685800" cy="475488"/>
           </a:xfrm>
           <a:prstGeom prst="rect">
             <a:avLst/>
@@ -23047,18 +22945,18 @@
       </p:sp>
       <p:sp>
         <p:nvSpPr>
-          <p:cNvPr id="52" name="Shape 50"/>
+          <p:cNvPr id="51" name="Shape 49"/>
           <p:cNvSpPr/>
           <p:nvPr/>
         </p:nvSpPr>
         <p:spPr>
           <a:xfrm>
             <a:off x="7576947" y="4169664"/>
-            <a:ext cx="685800" cy="384048"/>
+            <a:ext cx="685800" cy="475488"/>
           </a:xfrm>
           <a:prstGeom prst="rect">
             <a:avLst>
-              <a:gd name="adj" fmla="val 9524"/>
+              <a:gd name="adj" fmla="val 7692"/>
             </a:avLst>
           </a:prstGeom>
           <a:solidFill>
@@ -23074,14 +22972,14 @@
       </p:sp>
       <p:sp>
         <p:nvSpPr>
-          <p:cNvPr id="53" name="Text 51"/>
+          <p:cNvPr id="52" name="Text 50"/>
           <p:cNvSpPr/>
           <p:nvPr/>
         </p:nvSpPr>
         <p:spPr>
           <a:xfrm>
             <a:off x="7576947" y="4169664"/>
-            <a:ext cx="685800" cy="384048"/>
+            <a:ext cx="685800" cy="475488"/>
           </a:xfrm>
           <a:prstGeom prst="rect">
             <a:avLst/>
@@ -27819,11 +27717,11 @@
         <p:spPr>
           <a:xfrm>
             <a:off x="1874520" y="4096512"/>
-            <a:ext cx="6903720" cy="804672"/>
+            <a:ext cx="6903720" cy="658368"/>
           </a:xfrm>
           <a:prstGeom prst="rect">
             <a:avLst>
-              <a:gd name="adj" fmla="val 6818"/>
+              <a:gd name="adj" fmla="val 8333"/>
             </a:avLst>
           </a:prstGeom>
           <a:solidFill>
@@ -27846,11 +27744,11 @@
         <p:spPr>
           <a:xfrm>
             <a:off x="2254649" y="4169664"/>
-            <a:ext cx="685800" cy="384048"/>
+            <a:ext cx="685800" cy="475488"/>
           </a:xfrm>
           <a:prstGeom prst="rect">
             <a:avLst>
-              <a:gd name="adj" fmla="val 9524"/>
+              <a:gd name="adj" fmla="val 7692"/>
             </a:avLst>
           </a:prstGeom>
           <a:solidFill>
@@ -27873,7 +27771,7 @@
         <p:spPr>
           <a:xfrm>
             <a:off x="2254649" y="4169664"/>
-            <a:ext cx="685800" cy="384048"/>
+            <a:ext cx="685800" cy="475488"/>
           </a:xfrm>
           <a:prstGeom prst="rect">
             <a:avLst/>
@@ -27897,7 +27795,7 @@
                 <a:ea typeface="Trebuchet MS" pitchFamily="34" charset="-122"/>
                 <a:cs typeface="Trebuchet MS" pitchFamily="34" charset="-120"/>
               </a:rPr>
-              <a:t>j</a:t>
+              <a:t>g</a:t>
             </a:r>
             <a:endParaRPr lang="en-US" sz="900" dirty="0"/>
           </a:p>
@@ -27905,57 +27803,18 @@
       </p:sp>
       <p:sp>
         <p:nvSpPr>
-          <p:cNvPr id="35" name="Text 33"/>
-          <p:cNvSpPr/>
-          <p:nvPr/>
-        </p:nvSpPr>
-        <p:spPr>
-          <a:xfrm>
-            <a:off x="2254649" y="4572000"/>
-            <a:ext cx="685800" cy="219456"/>
-          </a:xfrm>
-          <a:prstGeom prst="rect">
-            <a:avLst/>
-          </a:prstGeom>
-          <a:noFill/>
-          <a:ln/>
-        </p:spPr>
-        <p:txBody>
-          <a:bodyPr wrap="square" lIns="0" tIns="0" rIns="0" bIns="0" rtlCol="0" anchor="t"/>
-          <a:lstStyle/>
-          <a:p>
-            <a:pPr algn="ctr" indent="0" marL="0">
-              <a:buNone/>
-            </a:pPr>
-            <a:r>
-              <a:rPr lang="en-US" sz="750" i="1" dirty="0">
-                <a:solidFill>
-                  <a:srgbClr val="94A3B8"/>
-                </a:solidFill>
-                <a:latin typeface="Calibri" pitchFamily="34" charset="0"/>
-                <a:ea typeface="Calibri" pitchFamily="34" charset="-122"/>
-                <a:cs typeface="Calibri" pitchFamily="34" charset="-120"/>
-              </a:rPr>
-              <a:t>/j/</a:t>
-            </a:r>
-            <a:endParaRPr lang="en-US" sz="750" dirty="0"/>
-          </a:p>
-        </p:txBody>
-      </p:sp>
-      <p:sp>
-        <p:nvSpPr>
-          <p:cNvPr id="36" name="Shape 34"/>
+          <p:cNvPr id="35" name="Shape 33"/>
           <p:cNvSpPr/>
           <p:nvPr/>
         </p:nvSpPr>
         <p:spPr>
           <a:xfrm>
             <a:off x="3293146" y="4169664"/>
-            <a:ext cx="685800" cy="384048"/>
+            <a:ext cx="685800" cy="475488"/>
           </a:xfrm>
           <a:prstGeom prst="rect">
             <a:avLst>
-              <a:gd name="adj" fmla="val 9524"/>
+              <a:gd name="adj" fmla="val 7692"/>
             </a:avLst>
           </a:prstGeom>
           <a:solidFill>
@@ -27971,14 +27830,14 @@
       </p:sp>
       <p:sp>
         <p:nvSpPr>
-          <p:cNvPr id="37" name="Text 35"/>
+          <p:cNvPr id="36" name="Text 34"/>
           <p:cNvSpPr/>
           <p:nvPr/>
         </p:nvSpPr>
         <p:spPr>
           <a:xfrm>
             <a:off x="3293146" y="4169664"/>
-            <a:ext cx="685800" cy="384048"/>
+            <a:ext cx="685800" cy="475488"/>
           </a:xfrm>
           <a:prstGeom prst="rect">
             <a:avLst/>
@@ -28010,18 +27869,18 @@
       </p:sp>
       <p:sp>
         <p:nvSpPr>
-          <p:cNvPr id="38" name="Shape 36"/>
+          <p:cNvPr id="37" name="Shape 35"/>
           <p:cNvSpPr/>
           <p:nvPr/>
         </p:nvSpPr>
         <p:spPr>
           <a:xfrm>
             <a:off x="4331643" y="4169664"/>
-            <a:ext cx="685800" cy="384048"/>
+            <a:ext cx="685800" cy="475488"/>
           </a:xfrm>
           <a:prstGeom prst="rect">
             <a:avLst>
-              <a:gd name="adj" fmla="val 9524"/>
+              <a:gd name="adj" fmla="val 7692"/>
             </a:avLst>
           </a:prstGeom>
           <a:solidFill>
@@ -28037,14 +27896,14 @@
       </p:sp>
       <p:sp>
         <p:nvSpPr>
-          <p:cNvPr id="39" name="Text 37"/>
+          <p:cNvPr id="38" name="Text 36"/>
           <p:cNvSpPr/>
           <p:nvPr/>
         </p:nvSpPr>
         <p:spPr>
           <a:xfrm>
             <a:off x="4331643" y="4169664"/>
-            <a:ext cx="685800" cy="384048"/>
+            <a:ext cx="685800" cy="475488"/>
           </a:xfrm>
           <a:prstGeom prst="rect">
             <a:avLst/>
@@ -28076,18 +27935,18 @@
       </p:sp>
       <p:sp>
         <p:nvSpPr>
-          <p:cNvPr id="40" name="Shape 38"/>
+          <p:cNvPr id="39" name="Shape 37"/>
           <p:cNvSpPr/>
           <p:nvPr/>
         </p:nvSpPr>
         <p:spPr>
           <a:xfrm>
             <a:off x="5370141" y="4169664"/>
-            <a:ext cx="685800" cy="384048"/>
+            <a:ext cx="685800" cy="475488"/>
           </a:xfrm>
           <a:prstGeom prst="rect">
             <a:avLst>
-              <a:gd name="adj" fmla="val 9524"/>
+              <a:gd name="adj" fmla="val 7692"/>
             </a:avLst>
           </a:prstGeom>
           <a:solidFill>
@@ -28103,14 +27962,14 @@
       </p:sp>
       <p:sp>
         <p:nvSpPr>
-          <p:cNvPr id="41" name="Text 39"/>
+          <p:cNvPr id="40" name="Text 38"/>
           <p:cNvSpPr/>
           <p:nvPr/>
         </p:nvSpPr>
         <p:spPr>
           <a:xfrm>
             <a:off x="5370141" y="4169664"/>
-            <a:ext cx="685800" cy="384048"/>
+            <a:ext cx="685800" cy="475488"/>
           </a:xfrm>
           <a:prstGeom prst="rect">
             <a:avLst/>
@@ -28142,18 +28001,18 @@
       </p:sp>
       <p:sp>
         <p:nvSpPr>
-          <p:cNvPr id="42" name="Shape 40"/>
+          <p:cNvPr id="41" name="Shape 39"/>
           <p:cNvSpPr/>
           <p:nvPr/>
         </p:nvSpPr>
         <p:spPr>
           <a:xfrm>
             <a:off x="6408638" y="4169664"/>
-            <a:ext cx="685800" cy="384048"/>
+            <a:ext cx="685800" cy="475488"/>
           </a:xfrm>
           <a:prstGeom prst="rect">
             <a:avLst>
-              <a:gd name="adj" fmla="val 9524"/>
+              <a:gd name="adj" fmla="val 7692"/>
             </a:avLst>
           </a:prstGeom>
           <a:solidFill>
@@ -28169,14 +28028,14 @@
       </p:sp>
       <p:sp>
         <p:nvSpPr>
-          <p:cNvPr id="43" name="Text 41"/>
+          <p:cNvPr id="42" name="Text 40"/>
           <p:cNvSpPr/>
           <p:nvPr/>
         </p:nvSpPr>
         <p:spPr>
           <a:xfrm>
             <a:off x="6408638" y="4169664"/>
-            <a:ext cx="685800" cy="384048"/>
+            <a:ext cx="685800" cy="475488"/>
           </a:xfrm>
           <a:prstGeom prst="rect">
             <a:avLst/>
@@ -28208,18 +28067,18 @@
       </p:sp>
       <p:sp>
         <p:nvSpPr>
-          <p:cNvPr id="44" name="Shape 42"/>
+          <p:cNvPr id="43" name="Shape 41"/>
           <p:cNvSpPr/>
           <p:nvPr/>
         </p:nvSpPr>
         <p:spPr>
           <a:xfrm>
             <a:off x="7447135" y="4169664"/>
-            <a:ext cx="685800" cy="384048"/>
+            <a:ext cx="685800" cy="475488"/>
           </a:xfrm>
           <a:prstGeom prst="rect">
             <a:avLst>
-              <a:gd name="adj" fmla="val 9524"/>
+              <a:gd name="adj" fmla="val 7692"/>
             </a:avLst>
           </a:prstGeom>
           <a:solidFill>
@@ -28235,14 +28094,14 @@
       </p:sp>
       <p:sp>
         <p:nvSpPr>
-          <p:cNvPr id="45" name="Text 43"/>
+          <p:cNvPr id="44" name="Text 42"/>
           <p:cNvSpPr/>
           <p:nvPr/>
         </p:nvSpPr>
         <p:spPr>
           <a:xfrm>
             <a:off x="7447135" y="4169664"/>
-            <a:ext cx="685800" cy="384048"/>
+            <a:ext cx="685800" cy="475488"/>
           </a:xfrm>
           <a:prstGeom prst="rect">
             <a:avLst/>
@@ -32681,11 +32540,11 @@
         <p:spPr>
           <a:xfrm>
             <a:off x="1874520" y="4096512"/>
-            <a:ext cx="6903720" cy="804672"/>
+            <a:ext cx="6903720" cy="658368"/>
           </a:xfrm>
           <a:prstGeom prst="rect">
             <a:avLst>
-              <a:gd name="adj" fmla="val 6818"/>
+              <a:gd name="adj" fmla="val 8333"/>
             </a:avLst>
           </a:prstGeom>
           <a:solidFill>
@@ -32708,11 +32567,11 @@
         <p:spPr>
           <a:xfrm>
             <a:off x="1951828" y="4169664"/>
-            <a:ext cx="603504" cy="384048"/>
+            <a:ext cx="603504" cy="475488"/>
           </a:xfrm>
           <a:prstGeom prst="rect">
             <a:avLst>
-              <a:gd name="adj" fmla="val 9524"/>
+              <a:gd name="adj" fmla="val 7692"/>
             </a:avLst>
           </a:prstGeom>
           <a:solidFill>
@@ -32735,7 +32594,7 @@
         <p:spPr>
           <a:xfrm>
             <a:off x="1951828" y="4169664"/>
-            <a:ext cx="603504" cy="384048"/>
+            <a:ext cx="603504" cy="475488"/>
           </a:xfrm>
           <a:prstGeom prst="rect">
             <a:avLst/>
@@ -32759,7 +32618,7 @@
                 <a:ea typeface="Trebuchet MS" pitchFamily="34" charset="-122"/>
                 <a:cs typeface="Trebuchet MS" pitchFamily="34" charset="-120"/>
               </a:rPr>
-              <a:t>j</a:t>
+              <a:t>g</a:t>
             </a:r>
             <a:endParaRPr lang="en-US" sz="900" dirty="0"/>
           </a:p>
@@ -32767,57 +32626,18 @@
       </p:sp>
       <p:sp>
         <p:nvSpPr>
-          <p:cNvPr id="41" name="Text 39"/>
-          <p:cNvSpPr/>
-          <p:nvPr/>
-        </p:nvSpPr>
-        <p:spPr>
-          <a:xfrm>
-            <a:off x="1951828" y="4572000"/>
-            <a:ext cx="603504" cy="219456"/>
-          </a:xfrm>
-          <a:prstGeom prst="rect">
-            <a:avLst/>
-          </a:prstGeom>
-          <a:noFill/>
-          <a:ln/>
-        </p:spPr>
-        <p:txBody>
-          <a:bodyPr wrap="square" lIns="0" tIns="0" rIns="0" bIns="0" rtlCol="0" anchor="t"/>
-          <a:lstStyle/>
-          <a:p>
-            <a:pPr algn="ctr" indent="0" marL="0">
-              <a:buNone/>
-            </a:pPr>
-            <a:r>
-              <a:rPr lang="en-US" sz="750" i="1" dirty="0">
-                <a:solidFill>
-                  <a:srgbClr val="94A3B8"/>
-                </a:solidFill>
-                <a:latin typeface="Calibri" pitchFamily="34" charset="0"/>
-                <a:ea typeface="Calibri" pitchFamily="34" charset="-122"/>
-                <a:cs typeface="Calibri" pitchFamily="34" charset="-120"/>
-              </a:rPr>
-              <a:t>/j/</a:t>
-            </a:r>
-            <a:endParaRPr lang="en-US" sz="750" dirty="0"/>
-          </a:p>
-        </p:txBody>
-      </p:sp>
-      <p:sp>
-        <p:nvSpPr>
-          <p:cNvPr id="42" name="Shape 40"/>
+          <p:cNvPr id="41" name="Shape 39"/>
           <p:cNvSpPr/>
           <p:nvPr/>
         </p:nvSpPr>
         <p:spPr>
           <a:xfrm>
             <a:off x="2605209" y="4169664"/>
-            <a:ext cx="603504" cy="384048"/>
+            <a:ext cx="603504" cy="475488"/>
           </a:xfrm>
           <a:prstGeom prst="rect">
             <a:avLst>
-              <a:gd name="adj" fmla="val 9524"/>
+              <a:gd name="adj" fmla="val 7692"/>
             </a:avLst>
           </a:prstGeom>
           <a:solidFill>
@@ -32833,14 +32653,14 @@
       </p:sp>
       <p:sp>
         <p:nvSpPr>
-          <p:cNvPr id="43" name="Text 41"/>
+          <p:cNvPr id="42" name="Text 40"/>
           <p:cNvSpPr/>
           <p:nvPr/>
         </p:nvSpPr>
         <p:spPr>
           <a:xfrm>
             <a:off x="2605209" y="4169664"/>
-            <a:ext cx="603504" cy="384048"/>
+            <a:ext cx="603504" cy="475488"/>
           </a:xfrm>
           <a:prstGeom prst="rect">
             <a:avLst/>
@@ -32872,18 +32692,18 @@
       </p:sp>
       <p:sp>
         <p:nvSpPr>
-          <p:cNvPr id="44" name="Shape 42"/>
+          <p:cNvPr id="43" name="Shape 41"/>
           <p:cNvSpPr/>
           <p:nvPr/>
         </p:nvSpPr>
         <p:spPr>
           <a:xfrm>
             <a:off x="3258589" y="4169664"/>
-            <a:ext cx="603504" cy="384048"/>
+            <a:ext cx="603504" cy="475488"/>
           </a:xfrm>
           <a:prstGeom prst="rect">
             <a:avLst>
-              <a:gd name="adj" fmla="val 9524"/>
+              <a:gd name="adj" fmla="val 7692"/>
             </a:avLst>
           </a:prstGeom>
           <a:solidFill>
@@ -32899,14 +32719,14 @@
       </p:sp>
       <p:sp>
         <p:nvSpPr>
-          <p:cNvPr id="45" name="Text 43"/>
+          <p:cNvPr id="44" name="Text 42"/>
           <p:cNvSpPr/>
           <p:nvPr/>
         </p:nvSpPr>
         <p:spPr>
           <a:xfrm>
             <a:off x="3258589" y="4169664"/>
-            <a:ext cx="603504" cy="384048"/>
+            <a:ext cx="603504" cy="475488"/>
           </a:xfrm>
           <a:prstGeom prst="rect">
             <a:avLst/>
@@ -32938,18 +32758,18 @@
       </p:sp>
       <p:sp>
         <p:nvSpPr>
-          <p:cNvPr id="46" name="Shape 44"/>
+          <p:cNvPr id="45" name="Shape 43"/>
           <p:cNvSpPr/>
           <p:nvPr/>
         </p:nvSpPr>
         <p:spPr>
           <a:xfrm>
             <a:off x="3911969" y="4169664"/>
-            <a:ext cx="603504" cy="384048"/>
+            <a:ext cx="603504" cy="475488"/>
           </a:xfrm>
           <a:prstGeom prst="rect">
             <a:avLst>
-              <a:gd name="adj" fmla="val 9524"/>
+              <a:gd name="adj" fmla="val 7692"/>
             </a:avLst>
           </a:prstGeom>
           <a:solidFill>
@@ -32965,14 +32785,14 @@
       </p:sp>
       <p:sp>
         <p:nvSpPr>
-          <p:cNvPr id="47" name="Text 45"/>
+          <p:cNvPr id="46" name="Text 44"/>
           <p:cNvSpPr/>
           <p:nvPr/>
         </p:nvSpPr>
         <p:spPr>
           <a:xfrm>
             <a:off x="3911969" y="4169664"/>
-            <a:ext cx="603504" cy="384048"/>
+            <a:ext cx="603504" cy="475488"/>
           </a:xfrm>
           <a:prstGeom prst="rect">
             <a:avLst/>
@@ -33004,18 +32824,18 @@
       </p:sp>
       <p:sp>
         <p:nvSpPr>
-          <p:cNvPr id="48" name="Shape 46"/>
+          <p:cNvPr id="47" name="Shape 45"/>
           <p:cNvSpPr/>
           <p:nvPr/>
         </p:nvSpPr>
         <p:spPr>
           <a:xfrm>
             <a:off x="4565350" y="4169664"/>
-            <a:ext cx="603504" cy="384048"/>
+            <a:ext cx="603504" cy="475488"/>
           </a:xfrm>
           <a:prstGeom prst="rect">
             <a:avLst>
-              <a:gd name="adj" fmla="val 9524"/>
+              <a:gd name="adj" fmla="val 7692"/>
             </a:avLst>
           </a:prstGeom>
           <a:solidFill>
@@ -33031,14 +32851,14 @@
       </p:sp>
       <p:sp>
         <p:nvSpPr>
-          <p:cNvPr id="49" name="Text 47"/>
+          <p:cNvPr id="48" name="Text 46"/>
           <p:cNvSpPr/>
           <p:nvPr/>
         </p:nvSpPr>
         <p:spPr>
           <a:xfrm>
             <a:off x="4565350" y="4169664"/>
-            <a:ext cx="603504" cy="384048"/>
+            <a:ext cx="603504" cy="475488"/>
           </a:xfrm>
           <a:prstGeom prst="rect">
             <a:avLst/>
@@ -33070,80 +32890,41 @@
       </p:sp>
       <p:sp>
         <p:nvSpPr>
+          <p:cNvPr id="49" name="Shape 47"/>
+          <p:cNvSpPr/>
+          <p:nvPr/>
+        </p:nvSpPr>
+        <p:spPr>
+          <a:xfrm>
+            <a:off x="5218730" y="4169664"/>
+            <a:ext cx="603504" cy="475488"/>
+          </a:xfrm>
+          <a:prstGeom prst="rect">
+            <a:avLst>
+              <a:gd name="adj" fmla="val 7692"/>
+            </a:avLst>
+          </a:prstGeom>
+          <a:solidFill>
+            <a:srgbClr val="FFFFFF"/>
+          </a:solidFill>
+          <a:ln w="12700">
+            <a:solidFill>
+              <a:srgbClr val="DB2777"/>
+            </a:solidFill>
+            <a:prstDash val="solid"/>
+          </a:ln>
+        </p:spPr>
+      </p:sp>
+      <p:sp>
+        <p:nvSpPr>
           <p:cNvPr id="50" name="Text 48"/>
           <p:cNvSpPr/>
           <p:nvPr/>
         </p:nvSpPr>
         <p:spPr>
           <a:xfrm>
-            <a:off x="4565350" y="4572000"/>
-            <a:ext cx="603504" cy="219456"/>
-          </a:xfrm>
-          <a:prstGeom prst="rect">
-            <a:avLst/>
-          </a:prstGeom>
-          <a:noFill/>
-          <a:ln/>
-        </p:spPr>
-        <p:txBody>
-          <a:bodyPr wrap="square" lIns="0" tIns="0" rIns="0" bIns="0" rtlCol="0" anchor="t"/>
-          <a:lstStyle/>
-          <a:p>
-            <a:pPr algn="ctr" indent="0" marL="0">
-              <a:buNone/>
-            </a:pPr>
-            <a:r>
-              <a:rPr lang="en-US" sz="750" i="1" dirty="0">
-                <a:solidFill>
-                  <a:srgbClr val="94A3B8"/>
-                </a:solidFill>
-                <a:latin typeface="Calibri" pitchFamily="34" charset="0"/>
-                <a:ea typeface="Calibri" pitchFamily="34" charset="-122"/>
-                <a:cs typeface="Calibri" pitchFamily="34" charset="-120"/>
-              </a:rPr>
-              <a:t>/k/</a:t>
-            </a:r>
-            <a:endParaRPr lang="en-US" sz="750" dirty="0"/>
-          </a:p>
-        </p:txBody>
-      </p:sp>
-      <p:sp>
-        <p:nvSpPr>
-          <p:cNvPr id="51" name="Shape 49"/>
-          <p:cNvSpPr/>
-          <p:nvPr/>
-        </p:nvSpPr>
-        <p:spPr>
-          <a:xfrm>
             <a:off x="5218730" y="4169664"/>
-            <a:ext cx="603504" cy="384048"/>
-          </a:xfrm>
-          <a:prstGeom prst="rect">
-            <a:avLst>
-              <a:gd name="adj" fmla="val 9524"/>
-            </a:avLst>
-          </a:prstGeom>
-          <a:solidFill>
-            <a:srgbClr val="FFFFFF"/>
-          </a:solidFill>
-          <a:ln w="12700">
-            <a:solidFill>
-              <a:srgbClr val="DB2777"/>
-            </a:solidFill>
-            <a:prstDash val="solid"/>
-          </a:ln>
-        </p:spPr>
-      </p:sp>
-      <p:sp>
-        <p:nvSpPr>
-          <p:cNvPr id="52" name="Text 50"/>
-          <p:cNvSpPr/>
-          <p:nvPr/>
-        </p:nvSpPr>
-        <p:spPr>
-          <a:xfrm>
-            <a:off x="5218730" y="4169664"/>
-            <a:ext cx="603504" cy="384048"/>
+            <a:ext cx="603504" cy="475488"/>
           </a:xfrm>
           <a:prstGeom prst="rect">
             <a:avLst/>
@@ -33175,18 +32956,18 @@
       </p:sp>
       <p:sp>
         <p:nvSpPr>
-          <p:cNvPr id="53" name="Shape 51"/>
+          <p:cNvPr id="51" name="Shape 49"/>
           <p:cNvSpPr/>
           <p:nvPr/>
         </p:nvSpPr>
         <p:spPr>
           <a:xfrm>
             <a:off x="5872111" y="4169664"/>
-            <a:ext cx="603504" cy="384048"/>
+            <a:ext cx="603504" cy="475488"/>
           </a:xfrm>
           <a:prstGeom prst="rect">
             <a:avLst>
-              <a:gd name="adj" fmla="val 9524"/>
+              <a:gd name="adj" fmla="val 7692"/>
             </a:avLst>
           </a:prstGeom>
           <a:solidFill>
@@ -33202,14 +32983,14 @@
       </p:sp>
       <p:sp>
         <p:nvSpPr>
-          <p:cNvPr id="54" name="Text 52"/>
+          <p:cNvPr id="52" name="Text 50"/>
           <p:cNvSpPr/>
           <p:nvPr/>
         </p:nvSpPr>
         <p:spPr>
           <a:xfrm>
             <a:off x="5872111" y="4169664"/>
-            <a:ext cx="603504" cy="384048"/>
+            <a:ext cx="603504" cy="475488"/>
           </a:xfrm>
           <a:prstGeom prst="rect">
             <a:avLst/>
@@ -33241,18 +33022,18 @@
       </p:sp>
       <p:sp>
         <p:nvSpPr>
-          <p:cNvPr id="55" name="Shape 53"/>
+          <p:cNvPr id="53" name="Shape 51"/>
           <p:cNvSpPr/>
           <p:nvPr/>
         </p:nvSpPr>
         <p:spPr>
           <a:xfrm>
             <a:off x="6525491" y="4169664"/>
-            <a:ext cx="603504" cy="384048"/>
+            <a:ext cx="603504" cy="475488"/>
           </a:xfrm>
           <a:prstGeom prst="rect">
             <a:avLst>
-              <a:gd name="adj" fmla="val 9524"/>
+              <a:gd name="adj" fmla="val 7692"/>
             </a:avLst>
           </a:prstGeom>
           <a:solidFill>
@@ -33268,14 +33049,14 @@
       </p:sp>
       <p:sp>
         <p:nvSpPr>
-          <p:cNvPr id="56" name="Text 54"/>
+          <p:cNvPr id="54" name="Text 52"/>
           <p:cNvSpPr/>
           <p:nvPr/>
         </p:nvSpPr>
         <p:spPr>
           <a:xfrm>
             <a:off x="6525491" y="4169664"/>
-            <a:ext cx="603504" cy="384048"/>
+            <a:ext cx="603504" cy="475488"/>
           </a:xfrm>
           <a:prstGeom prst="rect">
             <a:avLst/>
@@ -33307,18 +33088,18 @@
       </p:sp>
       <p:sp>
         <p:nvSpPr>
-          <p:cNvPr id="57" name="Shape 55"/>
+          <p:cNvPr id="55" name="Shape 53"/>
           <p:cNvSpPr/>
           <p:nvPr/>
         </p:nvSpPr>
         <p:spPr>
           <a:xfrm>
             <a:off x="7178871" y="4169664"/>
-            <a:ext cx="603504" cy="384048"/>
+            <a:ext cx="603504" cy="475488"/>
           </a:xfrm>
           <a:prstGeom prst="rect">
             <a:avLst>
-              <a:gd name="adj" fmla="val 9524"/>
+              <a:gd name="adj" fmla="val 7692"/>
             </a:avLst>
           </a:prstGeom>
           <a:solidFill>
@@ -33334,14 +33115,14 @@
       </p:sp>
       <p:sp>
         <p:nvSpPr>
-          <p:cNvPr id="58" name="Text 56"/>
+          <p:cNvPr id="56" name="Text 54"/>
           <p:cNvSpPr/>
           <p:nvPr/>
         </p:nvSpPr>
         <p:spPr>
           <a:xfrm>
             <a:off x="7178871" y="4169664"/>
-            <a:ext cx="603504" cy="384048"/>
+            <a:ext cx="603504" cy="475488"/>
           </a:xfrm>
           <a:prstGeom prst="rect">
             <a:avLst/>
@@ -33373,18 +33154,18 @@
       </p:sp>
       <p:sp>
         <p:nvSpPr>
-          <p:cNvPr id="59" name="Shape 57"/>
+          <p:cNvPr id="57" name="Shape 55"/>
           <p:cNvSpPr/>
           <p:nvPr/>
         </p:nvSpPr>
         <p:spPr>
           <a:xfrm>
             <a:off x="7832252" y="4169664"/>
-            <a:ext cx="603504" cy="384048"/>
+            <a:ext cx="603504" cy="475488"/>
           </a:xfrm>
           <a:prstGeom prst="rect">
             <a:avLst>
-              <a:gd name="adj" fmla="val 9524"/>
+              <a:gd name="adj" fmla="val 7692"/>
             </a:avLst>
           </a:prstGeom>
           <a:solidFill>
@@ -33400,14 +33181,14 @@
       </p:sp>
       <p:sp>
         <p:nvSpPr>
-          <p:cNvPr id="60" name="Text 58"/>
+          <p:cNvPr id="58" name="Text 56"/>
           <p:cNvSpPr/>
           <p:nvPr/>
         </p:nvSpPr>
         <p:spPr>
           <a:xfrm>
             <a:off x="7832252" y="4169664"/>
-            <a:ext cx="603504" cy="384048"/>
+            <a:ext cx="603504" cy="475488"/>
           </a:xfrm>
           <a:prstGeom prst="rect">
             <a:avLst/>
@@ -37688,7 +37469,7 @@
                 <a:ea typeface="Calibri" pitchFamily="34" charset="-122"/>
                 <a:cs typeface="Calibri" pitchFamily="34" charset="-120"/>
               </a:rPr>
-              <a:t>1.  An autogyro is a type of submarine that travels underwater.</a:t>
+              <a:t>1.  A gyroscope is used to measure temperature.</a:t>
             </a:r>
             <a:endParaRPr lang="en-US" sz="1300" dirty="0"/>
           </a:p>
@@ -37827,7 +37608,7 @@
                 <a:ea typeface="Calibri" pitchFamily="34" charset="-122"/>
                 <a:cs typeface="Calibri" pitchFamily="34" charset="-120"/>
               </a:rPr>
-              <a:t>2.  Words with 'gyro' are always related to spinning or circular movement.</a:t>
+              <a:t>2.  The word 'gyrate' means to move in a circular or spinning motion.</a:t>
             </a:r>
             <a:endParaRPr lang="en-US" sz="1300" dirty="0"/>
           </a:p>
@@ -37966,7 +37747,7 @@
                 <a:ea typeface="Calibri" pitchFamily="34" charset="-122"/>
                 <a:cs typeface="Calibri" pitchFamily="34" charset="-120"/>
               </a:rPr>
-              <a:t>3.  A gyroscope is used to measure temperature.</a:t>
+              <a:t>3.  An autogyro is a type of submarine that travels underwater.</a:t>
             </a:r>
             <a:endParaRPr lang="en-US" sz="1300" dirty="0"/>
           </a:p>
@@ -38244,7 +38025,7 @@
                 <a:ea typeface="Calibri" pitchFamily="34" charset="-122"/>
                 <a:cs typeface="Calibri" pitchFamily="34" charset="-120"/>
               </a:rPr>
-              <a:t>5.  The word 'gyrate' means to move in a circular or spinning motion.</a:t>
+              <a:t>5.  Words with 'gyro' are always related to spinning or circular movement.</a:t>
             </a:r>
             <a:endParaRPr lang="en-US" sz="1300" dirty="0"/>
           </a:p>
